--- a/idm-doc/簡報/IDM帳號同步移轉上線程序_20260102.pptx
+++ b/idm-doc/簡報/IDM帳號同步移轉上線程序_20260102.pptx
@@ -377,7 +377,7 @@
           <a:p>
             <a:fld id="{72598716-CCB9-4C33-BBB1-4BDB23B72C8C}" type="datetimeFigureOut">
               <a:rPr lang="zh-TW" altLang="en-US" smtClean="0"/>
-              <a:t>2026/1/5</a:t>
+              <a:t>2026/6/25</a:t>
             </a:fld>
             <a:endParaRPr lang="zh-TW" altLang="en-US"/>
           </a:p>
@@ -633,7 +633,7 @@
           <a:p>
             <a:fld id="{F647F676-393F-41EA-90CC-2245CD39E234}" type="datetimeFigureOut">
               <a:rPr lang="zh-TW" altLang="en-US" smtClean="0"/>
-              <a:t>2026/1/5</a:t>
+              <a:t>2026/6/25</a:t>
             </a:fld>
             <a:endParaRPr lang="zh-TW" altLang="en-US"/>
           </a:p>
@@ -1024,7 +1024,7 @@
           <a:p>
             <a:fld id="{F647F676-393F-41EA-90CC-2245CD39E234}" type="datetimeFigureOut">
               <a:rPr lang="zh-TW" altLang="en-US" smtClean="0"/>
-              <a:t>2026/1/5</a:t>
+              <a:t>2026/6/25</a:t>
             </a:fld>
             <a:endParaRPr lang="zh-TW" altLang="en-US"/>
           </a:p>
@@ -7030,4 +7030,26 @@
     </a:ext>
   </a:extLst>
 </a:theme>
+</file>
+
+<file path=ppt/webextensions/taskpanes.xml><?xml version="1.0" encoding="utf-8"?>
+<wetp:taskpanes xmlns:wetp="http://schemas.microsoft.com/office/webextensions/taskpanes/2010/11">
+  <wetp:taskpane dockstate="right" visibility="0" width="350" row="1">
+    <wetp:webextensionref xmlns:r="http://schemas.openxmlformats.org/officeDocument/2006/relationships" r:id="rId1"/>
+  </wetp:taskpane>
+</wetp:taskpanes>
+</file>
+
+<file path=ppt/webextensions/webextension1.xml><?xml version="1.0" encoding="utf-8"?>
+<we:webextension xmlns:we="http://schemas.microsoft.com/office/webextensions/webextension/2010/11" id="{11614B93-8920-4987-B3A0-CB6306DA3DEF}">
+  <we:reference id="wa200010725" version="1.0.0.1" store="zh-TW" storeType="OMEX"/>
+  <we:alternateReferences>
+    <we:reference id="WA200010725" version="1.0.0.1" store="WA200010725" storeType="OMEX"/>
+  </we:alternateReferences>
+  <we:properties>
+    <we:property name="claude.fileId" value="&quot;c276dd54-b766-442a-8596-b43a6fca2d5a&quot;"/>
+  </we:properties>
+  <we:bindings/>
+  <we:snapshot xmlns:r="http://schemas.openxmlformats.org/officeDocument/2006/relationships"/>
+</we:webextension>
 </file>